--- a/slide/themes/src/22_leisurely.pptx
+++ b/slide/themes/src/22_leisurely.pptx
@@ -6500,67 +6500,31 @@
           </a:bodyPr>
           <a:lstStyle>
             <a:lvl1pPr>
-              <a:defRPr sz="4000">
-                <a:latin typeface="Verdana"/>
-                <a:ea typeface="Verdana"/>
-                <a:cs typeface="Verdana"/>
-              </a:defRPr>
+              <a:defRPr sz="4000"/>
             </a:lvl1pPr>
             <a:lvl2pPr>
-              <a:defRPr sz="4000">
-                <a:latin typeface="Verdana"/>
-                <a:ea typeface="Verdana"/>
-                <a:cs typeface="Verdana"/>
-              </a:defRPr>
+              <a:defRPr sz="4000"/>
             </a:lvl2pPr>
             <a:lvl3pPr>
-              <a:defRPr sz="4000">
-                <a:latin typeface="Verdana"/>
-                <a:ea typeface="Verdana"/>
-                <a:cs typeface="Verdana"/>
-              </a:defRPr>
+              <a:defRPr sz="4000"/>
             </a:lvl3pPr>
             <a:lvl4pPr>
-              <a:defRPr sz="4000">
-                <a:latin typeface="Verdana"/>
-                <a:ea typeface="Verdana"/>
-                <a:cs typeface="Verdana"/>
-              </a:defRPr>
+              <a:defRPr sz="4000"/>
             </a:lvl4pPr>
             <a:lvl5pPr>
-              <a:defRPr sz="4000">
-                <a:latin typeface="Verdana"/>
-                <a:ea typeface="Verdana"/>
-                <a:cs typeface="Verdana"/>
-              </a:defRPr>
+              <a:defRPr sz="4000"/>
             </a:lvl5pPr>
             <a:lvl6pPr>
-              <a:defRPr sz="4000">
-                <a:latin typeface="Verdana"/>
-                <a:ea typeface="Verdana"/>
-                <a:cs typeface="Verdana"/>
-              </a:defRPr>
+              <a:defRPr sz="4000"/>
             </a:lvl6pPr>
             <a:lvl7pPr>
-              <a:defRPr sz="4000">
-                <a:latin typeface="Verdana"/>
-                <a:ea typeface="Verdana"/>
-                <a:cs typeface="Verdana"/>
-              </a:defRPr>
+              <a:defRPr sz="4000"/>
             </a:lvl7pPr>
             <a:lvl8pPr>
-              <a:defRPr sz="4000">
-                <a:latin typeface="Verdana"/>
-                <a:ea typeface="Verdana"/>
-                <a:cs typeface="Verdana"/>
-              </a:defRPr>
+              <a:defRPr sz="4000"/>
             </a:lvl8pPr>
             <a:lvl9pPr>
-              <a:defRPr sz="4000">
-                <a:latin typeface="Verdana"/>
-                <a:ea typeface="Verdana"/>
-                <a:cs typeface="Verdana"/>
-              </a:defRPr>
+              <a:defRPr sz="4000"/>
             </a:lvl9pPr>
           </a:lstStyle>
           <a:p>
@@ -6600,67 +6564,31 @@
           </a:bodyPr>
           <a:lstStyle>
             <a:lvl1pPr>
-              <a:defRPr sz="2400">
-                <a:latin typeface="Verdana"/>
-                <a:ea typeface="Verdana"/>
-                <a:cs typeface="Verdana"/>
-              </a:defRPr>
+              <a:defRPr sz="2400"/>
             </a:lvl1pPr>
             <a:lvl2pPr>
-              <a:defRPr sz="2000">
-                <a:latin typeface="Verdana"/>
-                <a:ea typeface="Verdana"/>
-                <a:cs typeface="Verdana"/>
-              </a:defRPr>
+              <a:defRPr sz="2000"/>
             </a:lvl2pPr>
             <a:lvl3pPr>
-              <a:defRPr sz="1800">
-                <a:latin typeface="Verdana"/>
-                <a:ea typeface="Verdana"/>
-                <a:cs typeface="Verdana"/>
-              </a:defRPr>
+              <a:defRPr sz="1800"/>
             </a:lvl3pPr>
             <a:lvl4pPr>
-              <a:defRPr sz="1600">
-                <a:latin typeface="Verdana"/>
-                <a:ea typeface="Verdana"/>
-                <a:cs typeface="Verdana"/>
-              </a:defRPr>
+              <a:defRPr sz="1600"/>
             </a:lvl4pPr>
             <a:lvl5pPr>
-              <a:defRPr sz="1400">
-                <a:latin typeface="Verdana"/>
-                <a:ea typeface="Verdana"/>
-                <a:cs typeface="Verdana"/>
-              </a:defRPr>
+              <a:defRPr sz="1400"/>
             </a:lvl5pPr>
             <a:lvl6pPr>
-              <a:defRPr>
-                <a:latin typeface="Verdana"/>
-                <a:ea typeface="Verdana"/>
-                <a:cs typeface="Verdana"/>
-              </a:defRPr>
+              <a:defRPr/>
             </a:lvl6pPr>
             <a:lvl7pPr>
-              <a:defRPr>
-                <a:latin typeface="Verdana"/>
-                <a:ea typeface="Verdana"/>
-                <a:cs typeface="Verdana"/>
-              </a:defRPr>
+              <a:defRPr/>
             </a:lvl7pPr>
             <a:lvl8pPr>
-              <a:defRPr>
-                <a:latin typeface="Verdana"/>
-                <a:ea typeface="Verdana"/>
-                <a:cs typeface="Verdana"/>
-              </a:defRPr>
+              <a:defRPr/>
             </a:lvl8pPr>
             <a:lvl9pPr>
-              <a:defRPr>
-                <a:latin typeface="Verdana"/>
-                <a:ea typeface="Verdana"/>
-                <a:cs typeface="Verdana"/>
-              </a:defRPr>
+              <a:defRPr/>
             </a:lvl9pPr>
           </a:lstStyle>
           <a:p>
@@ -7402,14 +7330,14 @@
     </a:clrScheme>
     <a:fontScheme name="Office Theme">
       <a:majorFont>
-        <a:latin typeface="Arial"/>
-        <a:ea typeface="SimSun"/>
-        <a:cs typeface="Arial"/>
+        <a:latin typeface="Verdana"/>
+        <a:ea typeface="Microsoft YaHei"/>
+        <a:cs typeface="Tahoma"/>
       </a:majorFont>
       <a:minorFont>
-        <a:latin typeface="Arial"/>
-        <a:ea typeface="SimSun"/>
-        <a:cs typeface="Arial"/>
+        <a:latin typeface="Verdana"/>
+        <a:ea typeface="Microsoft YaHei"/>
+        <a:cs typeface="Tahoma"/>
       </a:minorFont>
     </a:fontScheme>
     <a:fmtScheme name="Office Theme">
@@ -7639,14 +7567,14 @@
     </a:clrScheme>
     <a:fontScheme name="Arial">
       <a:majorFont>
-        <a:latin typeface="Arial"/>
-        <a:ea typeface="Arial"/>
-        <a:cs typeface="Arial"/>
+        <a:latin typeface="Verdana"/>
+        <a:ea typeface="Microsoft YaHei"/>
+        <a:cs typeface="Tahoma"/>
       </a:majorFont>
       <a:minorFont>
-        <a:latin typeface="Arial"/>
-        <a:ea typeface="Arial"/>
-        <a:cs typeface="Arial"/>
+        <a:latin typeface="Verdana"/>
+        <a:ea typeface="Microsoft YaHei"/>
+        <a:cs typeface="Tahoma"/>
       </a:minorFont>
     </a:fontScheme>
     <a:fmtScheme name="Office">
